--- a/public/fun/pack/pptx/reviewpro/보장점검양식프리미엄_38_가족점검_퓨터실버.pptx
+++ b/public/fun/pack/pptx/reviewpro/보장점검양식프리미엄_38_가족점검_퓨터실버.pptx
@@ -112,12 +112,12 @@
   <p:extLst>
     <p:ext uri="{521415D9-36F7-43E2-AB2F-B90AF26B5E84}">
       <p14:sectionLst xmlns:p14="http://schemas.microsoft.com/office/powerpoint/2010/main">
-        <p14:section name="시작" id="{35D83EA1-886E-4386-A02D-34D7C8AB00E0}">
+        <p14:section name="시작" id="{0EF682EA-B6A2-4445-8A03-56E7209AF899}">
           <p14:sldIdLst>
             <p14:sldId id="256"/>
           </p14:sldIdLst>
         </p14:section>
-        <p14:section name="본문" id="{A306B315-10E1-4A0A-93DA-DD9CA5B3CC76}">
+        <p14:section name="본문" id="{8C232232-E321-48CB-B950-72B7145E2B04}">
           <p14:sldIdLst>
             <p14:sldId id="257"/>
             <p14:sldId id="258"/>
@@ -1672,7 +1672,7 @@
             </a:lvl1pPr>
           </a:lstStyle>
           <a:p>
-            <a:fld id="{5603F4A4-9F40-4DBC-825E-5748D07E3A08}" type="slidenum">
+            <a:fld id="{287C39CA-58A6-4714-95A5-FD562006CCAB}" type="slidenum">
               <a:rPr lang="en-US"/>
               <a:t>‹#›</a:t>
             </a:fld>
@@ -3083,7 +3083,7 @@
             </a:lvl1pPr>
           </a:lstStyle>
           <a:p>
-            <a:fld id="{B972802A-65A6-4BF9-94BE-E91108E9359E}" type="slidenum">
+            <a:fld id="{27A82718-F574-436A-8C41-27EC7438E5D1}" type="slidenum">
               <a:rPr lang="en-US"/>
               <a:t>‹#›</a:t>
             </a:fld>
@@ -4373,7 +4373,7 @@
             </a:lvl1pPr>
           </a:lstStyle>
           <a:p>
-            <a:fld id="{1D1CCCD2-7A21-4D3E-A776-EA043DCA79DF}" type="slidenum">
+            <a:fld id="{6D85C5E7-635F-47B9-98FA-654B21619646}" type="slidenum">
               <a:rPr lang="en-US"/>
               <a:t>‹#›</a:t>
             </a:fld>
@@ -5876,7 +5876,7 @@
           <a:p>
             <a:r>
               <a:rPr lang="ko-KR"/>
-              <a:t>명절에 모였을 때 같이 봅니다</a:t>
+              <a:t>가족이 모였을 때 같이 봅니다</a:t>
             </a:r>
           </a:p>
         </p:txBody>
@@ -5898,7 +5898,7 @@
           <a:p>
             <a:r>
               <a:rPr lang="ko-KR"/>
-              <a:t>가족 점검 · 0000. 00. 00</a:t>
+              <a:t>가족 점검 · 날짜 입력</a:t>
             </a:r>
           </a:p>
           <a:p>
@@ -5989,7 +5989,7 @@
           <a:bodyPr/>
           <a:lstStyle/>
           <a:p>
-            <a:fld id="{5B9631CC-653F-4782-8284-13FBC4BA5B64}" type="slidenum">
+            <a:fld id="{B62BE4B3-C9AE-44F0-B3F4-7B1509EAE92E}" type="slidenum">
               <a:rPr lang="en-US"/>
               <a:t>‹#›</a:t>
             </a:fld>
@@ -6899,7 +6899,7 @@
           <a:bodyPr/>
           <a:lstStyle/>
           <a:p>
-            <a:fld id="{5DA48422-7743-42E6-9756-BDC2237A12B8}" type="slidenum">
+            <a:fld id="{05066F39-1309-4024-9B36-1FC9803831BA}" type="slidenum">
               <a:rPr lang="en-US"/>
               <a:t>‹#›</a:t>
             </a:fld>
@@ -8405,7 +8405,7 @@
           <a:bodyPr/>
           <a:lstStyle/>
           <a:p>
-            <a:fld id="{4863318C-23D7-48EE-8C67-3A016C74653F}" type="slidenum">
+            <a:fld id="{4F7CFB7D-792A-4912-BB5C-21E23A2AAFE3}" type="slidenum">
               <a:rPr lang="en-US"/>
               <a:t>‹#›</a:t>
             </a:fld>
@@ -9955,7 +9955,7 @@
           <a:bodyPr/>
           <a:lstStyle/>
           <a:p>
-            <a:fld id="{900DBC2A-2E43-4DCF-A763-C52E49478C0E}" type="slidenum">
+            <a:fld id="{3F15E401-4743-4785-B1BC-4558C117E47D}" type="slidenum">
               <a:rPr lang="en-US"/>
               <a:t>‹#›</a:t>
             </a:fld>
@@ -10907,7 +10907,7 @@
           <a:bodyPr/>
           <a:lstStyle/>
           <a:p>
-            <a:fld id="{27970D77-D7CC-4C90-9BFF-B4EB49A14795}" type="slidenum">
+            <a:fld id="{8D7DC3FB-3E24-429D-ADFE-682492B9F614}" type="slidenum">
               <a:rPr lang="en-US"/>
               <a:t>‹#›</a:t>
             </a:fld>
